--- a/sayt/media/resources/2026/10/mehnat-muhofazasi-13-mavzu.pptx
+++ b/sayt/media/resources/2026/10/mehnat-muhofazasi-13-mavzu.pptx
@@ -10851,7 +10851,7 @@
                 </a:solidFill>
                 <a:latin typeface="Georgia"/>
               </a:rPr>
-              <a:t>Shhvni saqlash sharoitlari va harorat rejimi</a:t>
+              <a:t>SHHVni saqlash sharoitlari va harorat rejimi</a:t>
             </a:r>
           </a:p>
         </p:txBody>
